--- a/Schools_ML_Track/camp_2026/slides/ML/ML04.pptx
+++ b/Schools_ML_Track/camp_2026/slides/ML/ML04.pptx
@@ -128,7 +128,7 @@
   <p:extLst>
     <p:ext uri="{521415D9-36F7-43E2-AB2F-B90AF26B5E84}">
       <p14:sectionLst xmlns:p14="http://schemas.microsoft.com/office/powerpoint/2010/main">
-        <p14:section name="Opening" id="{b07f97e6-4442-b931-3aa4-b8f84ebf9e19}">
+        <p14:section name="Opening" id="{3e02b2a2-842f-24f0-849a-d6a6e264538a}">
           <p14:sldIdLst>
             <p14:sldId id="256"/>
             <p14:sldId id="257"/>
@@ -139,7 +139,7 @@
             <p14:sldId id="262"/>
           </p14:sldIdLst>
         </p14:section>
-        <p14:section name="Block A" id="{08ac00b6-357e-13e5-d950-e1b87e39fb1a}">
+        <p14:section name="Block A" id="{b9f67cf7-d2f7-b645-ddbf-d11d0f288ac6}">
           <p14:sldIdLst>
             <p14:sldId id="263"/>
             <p14:sldId id="264"/>
@@ -149,15 +149,15 @@
             <p14:sldId id="269"/>
           </p14:sldIdLst>
         </p14:section>
-        <p14:section name="Break" id="{7d2bc92c-8400-c170-40ab-44539c1e0ab7}">
+        <p14:section name="Break" id="{e4286cf8-f2fe-bb50-fccb-efafae622592}">
           <p14:sldIdLst>
             <p14:sldId id="267"/>
           </p14:sldIdLst>
         </p14:section>
-        <p14:section name="Block A" id="{a2a2df14-2d06-5935-f29b-73e89102f3b3}">
+        <p14:section name="Block A" id="{e294389a-da70-3607-6fe9-d6314566a872}">
           <p14:sldIdLst/>
         </p14:section>
-        <p14:section name="Block B" id="{f966516f-883f-e53a-5d21-ae6c6a4fe824}">
+        <p14:section name="Block B" id="{9adc1029-6417-f221-2ef8-1f5ffe47d16e}">
           <p14:sldIdLst>
             <p14:sldId id="270"/>
             <p14:sldId id="271"/>
@@ -166,7 +166,7 @@
             <p14:sldId id="274"/>
           </p14:sldIdLst>
         </p14:section>
-        <p14:section name="Make and close" id="{244df0e0-6e50-5889-33d6-b56700a0b049}">
+        <p14:section name="Make and close" id="{e55bc150-3226-bd48-607f-43708de63042}">
           <p14:sldIdLst>
             <p14:sldId id="275"/>
             <p14:sldId id="276"/>

--- a/Schools_ML_Track/camp_2026/slides/ML/ML04.pptx
+++ b/Schools_ML_Track/camp_2026/slides/ML/ML04.pptx
@@ -128,7 +128,7 @@
   <p:extLst>
     <p:ext uri="{521415D9-36F7-43E2-AB2F-B90AF26B5E84}">
       <p14:sectionLst xmlns:p14="http://schemas.microsoft.com/office/powerpoint/2010/main">
-        <p14:section name="Opening" id="{3e02b2a2-842f-24f0-849a-d6a6e264538a}">
+        <p14:section name="Opening" id="{4cfcbe4f-5c60-01c8-0c17-e83d1dbfd87d}">
           <p14:sldIdLst>
             <p14:sldId id="256"/>
             <p14:sldId id="257"/>
@@ -139,7 +139,7 @@
             <p14:sldId id="262"/>
           </p14:sldIdLst>
         </p14:section>
-        <p14:section name="Block A" id="{b9f67cf7-d2f7-b645-ddbf-d11d0f288ac6}">
+        <p14:section name="Block A" id="{ee019850-6c0b-0389-99e5-fff98a830f21}">
           <p14:sldIdLst>
             <p14:sldId id="263"/>
             <p14:sldId id="264"/>
@@ -149,15 +149,15 @@
             <p14:sldId id="269"/>
           </p14:sldIdLst>
         </p14:section>
-        <p14:section name="Break" id="{e4286cf8-f2fe-bb50-fccb-efafae622592}">
+        <p14:section name="Break" id="{3010bc76-aba3-0b09-c92c-7d68cae8c463}">
           <p14:sldIdLst>
             <p14:sldId id="267"/>
           </p14:sldIdLst>
         </p14:section>
-        <p14:section name="Block A" id="{e294389a-da70-3607-6fe9-d6314566a872}">
+        <p14:section name="Block A" id="{cd4d7131-0b64-d736-5141-639b9e7504e7}">
           <p14:sldIdLst/>
         </p14:section>
-        <p14:section name="Block B" id="{9adc1029-6417-f221-2ef8-1f5ffe47d16e}">
+        <p14:section name="Block B" id="{7d5b740f-a22b-e4f5-13ac-a03fcc580361}">
           <p14:sldIdLst>
             <p14:sldId id="270"/>
             <p14:sldId id="271"/>
@@ -166,7 +166,7 @@
             <p14:sldId id="274"/>
           </p14:sldIdLst>
         </p14:section>
-        <p14:section name="Make and close" id="{e55bc150-3226-bd48-607f-43708de63042}">
+        <p14:section name="Make and close" id="{c17304ab-88c7-4676-bcf0-59e6895df269}">
           <p14:sldIdLst>
             <p14:sldId id="275"/>
             <p14:sldId id="276"/>
@@ -3199,7 +3199,24 @@
                 <a:ea typeface="Lato" pitchFamily="34" charset="-122"/>
                 <a:cs typeface="Lato" pitchFamily="34" charset="-120"/>
               </a:rPr>
-              <a:t>Decisions and a hand-written flower rule</a:t>
+              <a:t>Decisions and a</a:t>
+            </a:r>
+            <a:endParaRPr lang="en-US" sz="5600" dirty="0"/>
+          </a:p>
+          <a:p>
+            <a:pPr algn="l" indent="0" marL="0">
+              <a:buNone/>
+            </a:pPr>
+            <a:r>
+              <a:rPr lang="en-US" sz="5600" b="1" dirty="0">
+                <a:solidFill>
+                  <a:srgbClr val="FFFFFF"/>
+                </a:solidFill>
+                <a:latin typeface="Lato" pitchFamily="34" charset="0"/>
+                <a:ea typeface="Lato" pitchFamily="34" charset="-122"/>
+                <a:cs typeface="Lato" pitchFamily="34" charset="-120"/>
+              </a:rPr>
+              <a:t>hand-written flower rule</a:t>
             </a:r>
             <a:endParaRPr lang="en-US" sz="5600" dirty="0"/>
           </a:p>
@@ -3375,268 +3392,40 @@
           </a:p>
         </p:txBody>
       </p:sp>
-      <p:sp>
-        <p:nvSpPr>
-          <p:cNvPr id="3" name="Shape 1"/>
-          <p:cNvSpPr/>
+      <p:pic>
+        <p:nvPicPr>
+          <p:cNvPr id="3" name="Image 0" descr="Look closely">    </p:cNvPr>
+          <p:cNvPicPr>
+            <a:picLocks noChangeAspect="1"/>
+          </p:cNvPicPr>
           <p:nvPr/>
-        </p:nvSpPr>
-        <p:spPr>
-          <a:xfrm>
-            <a:off x="7498080" y="1737360"/>
-            <a:ext cx="4023360" cy="2172462"/>
-          </a:xfrm>
-          <a:prstGeom prst="roundRect">
-            <a:avLst>
-              <a:gd name="adj" fmla="val 3367"/>
-            </a:avLst>
-          </a:prstGeom>
-          <a:solidFill>
-            <a:srgbClr val="111111"/>
-          </a:solidFill>
-          <a:ln/>
-        </p:spPr>
-      </p:sp>
-      <p:sp>
-        <p:nvSpPr>
-          <p:cNvPr id="4" name="Text 2"/>
+        </p:nvPicPr>
+        <p:blipFill>
+          <a:blip r:embed="rId1"/>
+          <a:stretch>
+            <a:fillRect/>
+          </a:stretch>
+        </p:blipFill>
+        <p:spPr>
+          <a:xfrm>
+            <a:off x="9875520" y="4480560"/>
+            <a:ext cx="1645920" cy="1645920"/>
+          </a:xfrm>
+          <a:prstGeom prst="rect">
+            <a:avLst/>
+          </a:prstGeom>
+        </p:spPr>
+      </p:pic>
+      <p:sp>
+        <p:nvSpPr>
+          <p:cNvPr id="4" name="Text 1"/>
           <p:cNvSpPr txBox="1"/>
           <p:nvPr/>
         </p:nvSpPr>
         <p:spPr>
           <a:xfrm>
-            <a:off x="7699248" y="1938528"/>
-            <a:ext cx="3621024" cy="1770126"/>
-          </a:xfrm>
-          <a:prstGeom prst="rect">
-            <a:avLst/>
-          </a:prstGeom>
-          <a:noFill/>
-          <a:ln/>
-        </p:spPr>
-        <p:txBody>
-          <a:bodyPr wrap="square" lIns="0" tIns="0" rIns="0" bIns="0" rtlCol="0" anchor="t"/>
-          <a:lstStyle/>
-          <a:p>
-            <a:pPr algn="l" indent="0" marL="0">
-              <a:lnSpc>
-                <a:spcPts val="1950"/>
-              </a:lnSpc>
-              <a:buNone/>
-            </a:pPr>
-            <a:r>
-              <a:rPr lang="en-US" sz="1500" dirty="0">
-                <a:solidFill>
-                  <a:srgbClr val="FFFFFF"/>
-                </a:solidFill>
-                <a:latin typeface="Courier New" pitchFamily="34" charset="0"/>
-                <a:ea typeface="Courier New" pitchFamily="34" charset="-122"/>
-                <a:cs typeface="Courier New" pitchFamily="34" charset="-120"/>
-              </a:rPr>
-              <a:t>budget = 10000</a:t>
-            </a:r>
-            <a:endParaRPr lang="en-US" sz="1500" dirty="0"/>
-          </a:p>
-          <a:p>
-            <a:pPr algn="l" indent="0" marL="0">
-              <a:lnSpc>
-                <a:spcPts val="1950"/>
-              </a:lnSpc>
-              <a:buNone/>
-            </a:pPr>
-            <a:r>
-              <a:rPr lang="en-US" sz="1500" dirty="0">
-                <a:solidFill>
-                  <a:srgbClr val="FFFFFF"/>
-                </a:solidFill>
-                <a:latin typeface="Courier New" pitchFamily="34" charset="0"/>
-                <a:ea typeface="Courier New" pitchFamily="34" charset="-122"/>
-                <a:cs typeface="Courier New" pitchFamily="34" charset="-120"/>
-              </a:rPr>
-              <a:t>cost = 8000</a:t>
-            </a:r>
-            <a:endParaRPr lang="en-US" sz="1500" dirty="0"/>
-          </a:p>
-          <a:p>
-            <a:pPr algn="l" indent="0" marL="0">
-              <a:lnSpc>
-                <a:spcPts val="1950"/>
-              </a:lnSpc>
-              <a:buNone/>
-            </a:pPr>
-            <a:r>
-              <a:rPr lang="en-US" sz="1500" b="1" dirty="0">
-                <a:solidFill>
-                  <a:srgbClr val="FFFFFF"/>
-                </a:solidFill>
-                <a:latin typeface="Courier New" pitchFamily="34" charset="0"/>
-                <a:ea typeface="Courier New" pitchFamily="34" charset="-122"/>
-                <a:cs typeface="Courier New" pitchFamily="34" charset="-120"/>
-              </a:rPr>
-              <a:t>if</a:t>
-            </a:r>
-            <a:pPr algn="l" indent="0" marL="0">
-              <a:lnSpc>
-                <a:spcPts val="1950"/>
-              </a:lnSpc>
-              <a:buNone/>
-            </a:pPr>
-            <a:r>
-              <a:rPr lang="en-US" sz="1500" dirty="0">
-                <a:solidFill>
-                  <a:srgbClr val="FFFFFF"/>
-                </a:solidFill>
-                <a:latin typeface="Courier New" pitchFamily="34" charset="0"/>
-                <a:ea typeface="Courier New" pitchFamily="34" charset="-122"/>
-                <a:cs typeface="Courier New" pitchFamily="34" charset="-120"/>
-              </a:rPr>
-              <a:t> cost &lt;= budget:</a:t>
-            </a:r>
-            <a:endParaRPr lang="en-US" sz="1500" dirty="0"/>
-          </a:p>
-          <a:p>
-            <a:pPr algn="l" indent="0" marL="0">
-              <a:lnSpc>
-                <a:spcPts val="1950"/>
-              </a:lnSpc>
-              <a:buNone/>
-            </a:pPr>
-            <a:r>
-              <a:rPr lang="en-US" sz="1500" dirty="0">
-                <a:solidFill>
-                  <a:srgbClr val="FFFFFF"/>
-                </a:solidFill>
-                <a:latin typeface="Courier New" pitchFamily="34" charset="0"/>
-                <a:ea typeface="Courier New" pitchFamily="34" charset="-122"/>
-                <a:cs typeface="Courier New" pitchFamily="34" charset="-120"/>
-              </a:rPr>
-              <a:t>    message = </a:t>
-            </a:r>
-            <a:pPr algn="l" indent="0" marL="0">
-              <a:lnSpc>
-                <a:spcPts val="1950"/>
-              </a:lnSpc>
-              <a:buNone/>
-            </a:pPr>
-            <a:r>
-              <a:rPr lang="en-US" sz="1500" dirty="0">
-                <a:solidFill>
-                  <a:srgbClr val="E0BE36"/>
-                </a:solidFill>
-                <a:latin typeface="Courier New" pitchFamily="34" charset="0"/>
-                <a:ea typeface="Courier New" pitchFamily="34" charset="-122"/>
-                <a:cs typeface="Courier New" pitchFamily="34" charset="-120"/>
-              </a:rPr>
-              <a:t>"Within budget"</a:t>
-            </a:r>
-            <a:endParaRPr lang="en-US" sz="1500" dirty="0"/>
-          </a:p>
-          <a:p>
-            <a:pPr algn="l" indent="0" marL="0">
-              <a:lnSpc>
-                <a:spcPts val="1950"/>
-              </a:lnSpc>
-              <a:buNone/>
-            </a:pPr>
-            <a:r>
-              <a:rPr lang="en-US" sz="1500" b="1" dirty="0">
-                <a:solidFill>
-                  <a:srgbClr val="FFFFFF"/>
-                </a:solidFill>
-                <a:latin typeface="Courier New" pitchFamily="34" charset="0"/>
-                <a:ea typeface="Courier New" pitchFamily="34" charset="-122"/>
-                <a:cs typeface="Courier New" pitchFamily="34" charset="-120"/>
-              </a:rPr>
-              <a:t>else</a:t>
-            </a:r>
-            <a:pPr algn="l" indent="0" marL="0">
-              <a:lnSpc>
-                <a:spcPts val="1950"/>
-              </a:lnSpc>
-              <a:buNone/>
-            </a:pPr>
-            <a:r>
-              <a:rPr lang="en-US" sz="1500" dirty="0">
-                <a:solidFill>
-                  <a:srgbClr val="FFFFFF"/>
-                </a:solidFill>
-                <a:latin typeface="Courier New" pitchFamily="34" charset="0"/>
-                <a:ea typeface="Courier New" pitchFamily="34" charset="-122"/>
-                <a:cs typeface="Courier New" pitchFamily="34" charset="-120"/>
-              </a:rPr>
-              <a:t>:</a:t>
-            </a:r>
-            <a:endParaRPr lang="en-US" sz="1500" dirty="0"/>
-          </a:p>
-          <a:p>
-            <a:pPr algn="l" indent="0" marL="0">
-              <a:lnSpc>
-                <a:spcPts val="1950"/>
-              </a:lnSpc>
-              <a:buNone/>
-            </a:pPr>
-            <a:r>
-              <a:rPr lang="en-US" sz="1500" dirty="0">
-                <a:solidFill>
-                  <a:srgbClr val="FFFFFF"/>
-                </a:solidFill>
-                <a:latin typeface="Courier New" pitchFamily="34" charset="0"/>
-                <a:ea typeface="Courier New" pitchFamily="34" charset="-122"/>
-                <a:cs typeface="Courier New" pitchFamily="34" charset="-120"/>
-              </a:rPr>
-              <a:t>    message = </a:t>
-            </a:r>
-            <a:pPr algn="l" indent="0" marL="0">
-              <a:lnSpc>
-                <a:spcPts val="1950"/>
-              </a:lnSpc>
-              <a:buNone/>
-            </a:pPr>
-            <a:r>
-              <a:rPr lang="en-US" sz="1500" dirty="0">
-                <a:solidFill>
-                  <a:srgbClr val="E0BE36"/>
-                </a:solidFill>
-                <a:latin typeface="Courier New" pitchFamily="34" charset="0"/>
-                <a:ea typeface="Courier New" pitchFamily="34" charset="-122"/>
-                <a:cs typeface="Courier New" pitchFamily="34" charset="-120"/>
-              </a:rPr>
-              <a:t>"Over budget"</a:t>
-            </a:r>
-            <a:endParaRPr lang="en-US" sz="1500" dirty="0"/>
-          </a:p>
-          <a:p>
-            <a:pPr algn="l" indent="0" marL="0">
-              <a:lnSpc>
-                <a:spcPts val="1950"/>
-              </a:lnSpc>
-              <a:buNone/>
-            </a:pPr>
-            <a:r>
-              <a:rPr lang="en-US" sz="1500" dirty="0">
-                <a:solidFill>
-                  <a:srgbClr val="FFFFFF"/>
-                </a:solidFill>
-                <a:latin typeface="Courier New" pitchFamily="34" charset="0"/>
-                <a:ea typeface="Courier New" pitchFamily="34" charset="-122"/>
-                <a:cs typeface="Courier New" pitchFamily="34" charset="-120"/>
-              </a:rPr>
-              <a:t>print(message)</a:t>
-            </a:r>
-            <a:endParaRPr lang="en-US" sz="1500" dirty="0"/>
-          </a:p>
-        </p:txBody>
-      </p:sp>
-      <p:sp>
-        <p:nvSpPr>
-          <p:cNvPr id="5" name="Text 3"/>
-          <p:cNvSpPr txBox="1"/>
-          <p:nvPr/>
-        </p:nvSpPr>
-        <p:spPr>
-          <a:xfrm>
             <a:off x="640080" y="1737360"/>
-            <a:ext cx="6400800" cy="4389120"/>
+            <a:ext cx="8961120" cy="4389120"/>
           </a:xfrm>
           <a:prstGeom prst="rect">
             <a:avLst/>
@@ -7115,15 +6904,15 @@
           <a:p>
             <a:pPr algn="l" indent="0" marL="0">
               <a:lnSpc>
-                <a:spcPts val="3480"/>
+                <a:spcPts val="3240"/>
               </a:lnSpc>
               <a:spcAft>
-                <a:spcPts val="2520"/>
+                <a:spcPts val="2020"/>
               </a:spcAft>
               <a:buNone/>
             </a:pPr>
             <a:r>
-              <a:rPr lang="en-US" sz="2900" dirty="0">
+              <a:rPr lang="en-US" sz="2700" dirty="0">
                 <a:solidFill>
                   <a:srgbClr val="111111"/>
                 </a:solidFill>
@@ -7131,22 +6920,22 @@
                 <a:ea typeface="Lato" pitchFamily="34" charset="-122"/>
                 <a:cs typeface="Lato" pitchFamily="34" charset="-120"/>
               </a:rPr>
-              <a:t>A ticket costs UGX 5000. Write a decision that prints Buy when the budget is at least 5000 and Save otherwise. Test 4999, 5000 and 5001. Then say how many of the eight flowers your flower rule names correctly.</a:t>
-            </a:r>
-            <a:endParaRPr lang="en-US" sz="2900" dirty="0"/>
-          </a:p>
-          <a:p>
-            <a:pPr algn="l" indent="0" marL="0">
-              <a:lnSpc>
-                <a:spcPts val="3480"/>
+              <a:t>A ticket costs UGX 5000.</a:t>
+            </a:r>
+            <a:endParaRPr lang="en-US" sz="2700" dirty="0"/>
+          </a:p>
+          <a:p>
+            <a:pPr algn="l" indent="0" marL="0">
+              <a:lnSpc>
+                <a:spcPts val="3240"/>
               </a:lnSpc>
               <a:spcAft>
-                <a:spcPts val="2520"/>
+                <a:spcPts val="2020"/>
               </a:spcAft>
               <a:buNone/>
             </a:pPr>
             <a:r>
-              <a:rPr lang="en-US" sz="2900" dirty="0">
+              <a:rPr lang="en-US" sz="2700" dirty="0">
                 <a:solidFill>
                   <a:srgbClr val="111111"/>
                 </a:solidFill>
@@ -7154,9 +6943,78 @@
                 <a:ea typeface="Lato" pitchFamily="34" charset="-122"/>
                 <a:cs typeface="Lato" pitchFamily="34" charset="-120"/>
               </a:rPr>
-              <a:t>Save it as ML04. Write two sentences: what you changed and how you checked it.</a:t>
-            </a:r>
-            <a:endParaRPr lang="en-US" sz="2900" dirty="0"/>
+              <a:t>Write a decision that prints Buy when the budget is at least 5000 and Save otherwise.</a:t>
+            </a:r>
+            <a:endParaRPr lang="en-US" sz="2700" dirty="0"/>
+          </a:p>
+          <a:p>
+            <a:pPr algn="l" indent="0" marL="0">
+              <a:lnSpc>
+                <a:spcPts val="3240"/>
+              </a:lnSpc>
+              <a:spcAft>
+                <a:spcPts val="2020"/>
+              </a:spcAft>
+              <a:buNone/>
+            </a:pPr>
+            <a:r>
+              <a:rPr lang="en-US" sz="2700" dirty="0">
+                <a:solidFill>
+                  <a:srgbClr val="111111"/>
+                </a:solidFill>
+                <a:latin typeface="Lato" pitchFamily="34" charset="0"/>
+                <a:ea typeface="Lato" pitchFamily="34" charset="-122"/>
+                <a:cs typeface="Lato" pitchFamily="34" charset="-120"/>
+              </a:rPr>
+              <a:t>Test 4999, 5000 and 5001.</a:t>
+            </a:r>
+            <a:endParaRPr lang="en-US" sz="2700" dirty="0"/>
+          </a:p>
+          <a:p>
+            <a:pPr algn="l" indent="0" marL="0">
+              <a:lnSpc>
+                <a:spcPts val="3240"/>
+              </a:lnSpc>
+              <a:spcAft>
+                <a:spcPts val="2020"/>
+              </a:spcAft>
+              <a:buNone/>
+            </a:pPr>
+            <a:r>
+              <a:rPr lang="en-US" sz="2700" dirty="0">
+                <a:solidFill>
+                  <a:srgbClr val="111111"/>
+                </a:solidFill>
+                <a:latin typeface="Lato" pitchFamily="34" charset="0"/>
+                <a:ea typeface="Lato" pitchFamily="34" charset="-122"/>
+                <a:cs typeface="Lato" pitchFamily="34" charset="-120"/>
+              </a:rPr>
+              <a:t>Then say how many of the eight flowers your flower rule names correctly.</a:t>
+            </a:r>
+            <a:endParaRPr lang="en-US" sz="2700" dirty="0"/>
+          </a:p>
+          <a:p>
+            <a:pPr algn="l" indent="0" marL="0">
+              <a:lnSpc>
+                <a:spcPts val="3240"/>
+              </a:lnSpc>
+              <a:spcAft>
+                <a:spcPts val="2020"/>
+              </a:spcAft>
+              <a:buNone/>
+            </a:pPr>
+            <a:r>
+              <a:rPr lang="en-US" sz="2700" dirty="0">
+                <a:solidFill>
+                  <a:srgbClr val="111111"/>
+                </a:solidFill>
+                <a:latin typeface="Lato" pitchFamily="34" charset="0"/>
+                <a:ea typeface="Lato" pitchFamily="34" charset="-122"/>
+                <a:cs typeface="Lato" pitchFamily="34" charset="-120"/>
+              </a:rPr>
+              <a:t>Write two sentences: what you changed and how you checked it.</a:t>
+            </a:r>
+            <a:endParaRPr lang="en-US" sz="2700" dirty="0"/>
           </a:p>
         </p:txBody>
       </p:sp>
@@ -9445,7 +9303,7 @@
                 <a:ea typeface="Lato" pitchFamily="34" charset="-122"/>
                 <a:cs typeface="Lato" pitchFamily="34" charset="-120"/>
               </a:rPr>
-              <a:t>Three budgets meet the same rule.</a:t>
+              <a:t>Three budgets test the same rule.</a:t>
             </a:r>
             <a:endParaRPr lang="en-US" sz="2400" dirty="0"/>
           </a:p>
